--- a/report/presentation.pptx
+++ b/report/presentation.pptx
@@ -4,22 +4,19 @@
   <p:sldMasterIdLst>
     <p:sldMasterId id="2147483648" r:id="rId1"/>
   </p:sldMasterIdLst>
-  <p:notesMasterIdLst>
-    <p:notesMasterId r:id="rId12"/>
-  </p:notesMasterIdLst>
   <p:sldIdLst>
-    <p:sldId id="256" r:id="rId2"/>
-    <p:sldId id="257" r:id="rId3"/>
-    <p:sldId id="258" r:id="rId4"/>
-    <p:sldId id="259" r:id="rId5"/>
-    <p:sldId id="260" r:id="rId6"/>
-    <p:sldId id="261" r:id="rId7"/>
-    <p:sldId id="262" r:id="rId8"/>
-    <p:sldId id="263" r:id="rId9"/>
-    <p:sldId id="264" r:id="rId10"/>
-    <p:sldId id="265" r:id="rId11"/>
+    <p:sldId id="256" r:id="rId7"/>
+    <p:sldId id="257" r:id="rId8"/>
+    <p:sldId id="258" r:id="rId9"/>
+    <p:sldId id="259" r:id="rId10"/>
+    <p:sldId id="260" r:id="rId11"/>
+    <p:sldId id="261" r:id="rId12"/>
+    <p:sldId id="262" r:id="rId13"/>
+    <p:sldId id="263" r:id="rId14"/>
+    <p:sldId id="264" r:id="rId15"/>
+    <p:sldId id="265" r:id="rId16"/>
   </p:sldIdLst>
-  <p:sldSz cx="12192000" cy="6858000"/>
+  <p:sldSz cx="12191695" cy="6858000" type="screen4x3"/>
   <p:notesSz cx="6858000" cy="9144000"/>
   <p:defaultTextStyle>
     <a:defPPr>
@@ -116,456 +113,7 @@
       </a:defRPr>
     </a:lvl9pPr>
   </p:defaultTextStyle>
-  <p:extLst>
-    <p:ext uri="{EFAFB233-063F-42B5-8137-9DF3F51BA10A}">
-      <p15:sldGuideLst xmlns:p15="http://schemas.microsoft.com/office/powerpoint/2012/main">
-        <p15:guide id="1" orient="horz" pos="2160">
-          <p15:clr>
-            <a:srgbClr val="A4A3A4"/>
-          </p15:clr>
-        </p15:guide>
-        <p15:guide id="2" pos="2880">
-          <p15:clr>
-            <a:srgbClr val="A4A3A4"/>
-          </p15:clr>
-        </p15:guide>
-      </p15:sldGuideLst>
-    </p:ext>
-  </p:extLst>
 </p:presentation>
-</file>
-
-<file path=ppt/notesMasters/notesMaster1.xml><?xml version="1.0" encoding="utf-8"?>
-<p:notesMaster xmlns:a="http://schemas.openxmlformats.org/drawingml/2006/main" xmlns:r="http://schemas.openxmlformats.org/officeDocument/2006/relationships" xmlns:p="http://schemas.openxmlformats.org/presentationml/2006/main">
-  <p:cSld>
-    <p:bg>
-      <p:bgRef idx="1001">
-        <a:schemeClr val="bg1"/>
-      </p:bgRef>
-    </p:bg>
-    <p:spTree>
-      <p:nvGrpSpPr>
-        <p:cNvPr id="1" name=""/>
-        <p:cNvGrpSpPr/>
-        <p:nvPr/>
-      </p:nvGrpSpPr>
-      <p:grpSpPr>
-        <a:xfrm>
-          <a:off x="0" y="0"/>
-          <a:ext cx="0" cy="0"/>
-          <a:chOff x="0" y="0"/>
-          <a:chExt cx="0" cy="0"/>
-        </a:xfrm>
-      </p:grpSpPr>
-      <p:sp>
-        <p:nvSpPr>
-          <p:cNvPr id="2" name="Header Placeholder 1"/>
-          <p:cNvSpPr>
-            <a:spLocks noGrp="1"/>
-          </p:cNvSpPr>
-          <p:nvPr>
-            <p:ph type="hdr" sz="quarter"/>
-          </p:nvPr>
-        </p:nvSpPr>
-        <p:spPr>
-          <a:xfrm>
-            <a:off x="0" y="0"/>
-            <a:ext cx="2971800" cy="458788"/>
-          </a:xfrm>
-          <a:prstGeom prst="rect">
-            <a:avLst/>
-          </a:prstGeom>
-        </p:spPr>
-        <p:txBody>
-          <a:bodyPr vert="horz" lIns="91440" tIns="45720" rIns="91440" bIns="45720" rtlCol="0"/>
-          <a:lstStyle>
-            <a:lvl1pPr algn="l">
-              <a:defRPr sz="1200"/>
-            </a:lvl1pPr>
-          </a:lstStyle>
-          <a:p>
-            <a:endParaRPr lang="en-US"/>
-          </a:p>
-        </p:txBody>
-      </p:sp>
-      <p:sp>
-        <p:nvSpPr>
-          <p:cNvPr id="3" name="Date Placeholder 2"/>
-          <p:cNvSpPr>
-            <a:spLocks noGrp="1"/>
-          </p:cNvSpPr>
-          <p:nvPr>
-            <p:ph type="dt" idx="1"/>
-          </p:nvPr>
-        </p:nvSpPr>
-        <p:spPr>
-          <a:xfrm>
-            <a:off x="3884613" y="0"/>
-            <a:ext cx="2971800" cy="458788"/>
-          </a:xfrm>
-          <a:prstGeom prst="rect">
-            <a:avLst/>
-          </a:prstGeom>
-        </p:spPr>
-        <p:txBody>
-          <a:bodyPr vert="horz" lIns="91440" tIns="45720" rIns="91440" bIns="45720" rtlCol="0"/>
-          <a:lstStyle>
-            <a:lvl1pPr algn="r">
-              <a:defRPr sz="1200"/>
-            </a:lvl1pPr>
-          </a:lstStyle>
-          <a:p>
-            <a:fld id="{671F2401-2F59-1644-8DE4-54E2059680BF}" type="datetimeFigureOut">
-              <a:rPr lang="en-US" smtClean="0"/>
-              <a:t>4/21/26</a:t>
-            </a:fld>
-            <a:endParaRPr lang="en-US"/>
-          </a:p>
-        </p:txBody>
-      </p:sp>
-      <p:sp>
-        <p:nvSpPr>
-          <p:cNvPr id="4" name="Slide Image Placeholder 3"/>
-          <p:cNvSpPr>
-            <a:spLocks noGrp="1" noRot="1" noChangeAspect="1"/>
-          </p:cNvSpPr>
-          <p:nvPr>
-            <p:ph type="sldImg" idx="2"/>
-          </p:nvPr>
-        </p:nvSpPr>
-        <p:spPr>
-          <a:xfrm>
-            <a:off x="685800" y="1143000"/>
-            <a:ext cx="5486400" cy="3086100"/>
-          </a:xfrm>
-          <a:prstGeom prst="rect">
-            <a:avLst/>
-          </a:prstGeom>
-          <a:noFill/>
-          <a:ln w="12700">
-            <a:solidFill>
-              <a:prstClr val="black"/>
-            </a:solidFill>
-          </a:ln>
-        </p:spPr>
-        <p:txBody>
-          <a:bodyPr vert="horz" lIns="91440" tIns="45720" rIns="91440" bIns="45720" rtlCol="0" anchor="ctr"/>
-          <a:lstStyle/>
-          <a:p>
-            <a:endParaRPr lang="en-US"/>
-          </a:p>
-        </p:txBody>
-      </p:sp>
-      <p:sp>
-        <p:nvSpPr>
-          <p:cNvPr id="5" name="Notes Placeholder 4"/>
-          <p:cNvSpPr>
-            <a:spLocks noGrp="1"/>
-          </p:cNvSpPr>
-          <p:nvPr>
-            <p:ph type="body" sz="quarter" idx="3"/>
-          </p:nvPr>
-        </p:nvSpPr>
-        <p:spPr>
-          <a:xfrm>
-            <a:off x="685800" y="4400550"/>
-            <a:ext cx="5486400" cy="3600450"/>
-          </a:xfrm>
-          <a:prstGeom prst="rect">
-            <a:avLst/>
-          </a:prstGeom>
-        </p:spPr>
-        <p:txBody>
-          <a:bodyPr vert="horz" lIns="91440" tIns="45720" rIns="91440" bIns="45720" rtlCol="0"/>
-          <a:lstStyle/>
-          <a:p>
-            <a:pPr lvl="0"/>
-            <a:r>
-              <a:rPr lang="en-US"/>
-              <a:t>Click to edit Master text styles</a:t>
-            </a:r>
-          </a:p>
-          <a:p>
-            <a:pPr lvl="1"/>
-            <a:r>
-              <a:rPr lang="en-US"/>
-              <a:t>Second level</a:t>
-            </a:r>
-          </a:p>
-          <a:p>
-            <a:pPr lvl="2"/>
-            <a:r>
-              <a:rPr lang="en-US"/>
-              <a:t>Third level</a:t>
-            </a:r>
-          </a:p>
-          <a:p>
-            <a:pPr lvl="3"/>
-            <a:r>
-              <a:rPr lang="en-US"/>
-              <a:t>Fourth level</a:t>
-            </a:r>
-          </a:p>
-          <a:p>
-            <a:pPr lvl="4"/>
-            <a:r>
-              <a:rPr lang="en-US"/>
-              <a:t>Fifth level</a:t>
-            </a:r>
-          </a:p>
-        </p:txBody>
-      </p:sp>
-      <p:sp>
-        <p:nvSpPr>
-          <p:cNvPr id="6" name="Footer Placeholder 5"/>
-          <p:cNvSpPr>
-            <a:spLocks noGrp="1"/>
-          </p:cNvSpPr>
-          <p:nvPr>
-            <p:ph type="ftr" sz="quarter" idx="4"/>
-          </p:nvPr>
-        </p:nvSpPr>
-        <p:spPr>
-          <a:xfrm>
-            <a:off x="0" y="8685213"/>
-            <a:ext cx="2971800" cy="458787"/>
-          </a:xfrm>
-          <a:prstGeom prst="rect">
-            <a:avLst/>
-          </a:prstGeom>
-        </p:spPr>
-        <p:txBody>
-          <a:bodyPr vert="horz" lIns="91440" tIns="45720" rIns="91440" bIns="45720" rtlCol="0" anchor="b"/>
-          <a:lstStyle>
-            <a:lvl1pPr algn="l">
-              <a:defRPr sz="1200"/>
-            </a:lvl1pPr>
-          </a:lstStyle>
-          <a:p>
-            <a:endParaRPr lang="en-US"/>
-          </a:p>
-        </p:txBody>
-      </p:sp>
-      <p:sp>
-        <p:nvSpPr>
-          <p:cNvPr id="7" name="Slide Number Placeholder 6"/>
-          <p:cNvSpPr>
-            <a:spLocks noGrp="1"/>
-          </p:cNvSpPr>
-          <p:nvPr>
-            <p:ph type="sldNum" sz="quarter" idx="5"/>
-          </p:nvPr>
-        </p:nvSpPr>
-        <p:spPr>
-          <a:xfrm>
-            <a:off x="3884613" y="8685213"/>
-            <a:ext cx="2971800" cy="458787"/>
-          </a:xfrm>
-          <a:prstGeom prst="rect">
-            <a:avLst/>
-          </a:prstGeom>
-        </p:spPr>
-        <p:txBody>
-          <a:bodyPr vert="horz" lIns="91440" tIns="45720" rIns="91440" bIns="45720" rtlCol="0" anchor="b"/>
-          <a:lstStyle>
-            <a:lvl1pPr algn="r">
-              <a:defRPr sz="1200"/>
-            </a:lvl1pPr>
-          </a:lstStyle>
-          <a:p>
-            <a:fld id="{A285BCF8-5EF9-8940-B577-70583C978942}" type="slidenum">
-              <a:rPr lang="en-US" smtClean="0"/>
-              <a:t>‹#›</a:t>
-            </a:fld>
-            <a:endParaRPr lang="en-US"/>
-          </a:p>
-        </p:txBody>
-      </p:sp>
-    </p:spTree>
-    <p:extLst>
-      <p:ext uri="{BB962C8B-B14F-4D97-AF65-F5344CB8AC3E}">
-        <p14:creationId xmlns:p14="http://schemas.microsoft.com/office/powerpoint/2010/main" val="3985579033"/>
-      </p:ext>
-    </p:extLst>
-  </p:cSld>
-  <p:clrMap bg1="lt1" tx1="dk1" bg2="lt2" tx2="dk2" accent1="accent1" accent2="accent2" accent3="accent3" accent4="accent4" accent5="accent5" accent6="accent6" hlink="hlink" folHlink="folHlink"/>
-  <p:notesStyle>
-    <a:lvl1pPr marL="0" algn="l" defTabSz="914400" rtl="0" eaLnBrk="1" latinLnBrk="0" hangingPunct="1">
-      <a:defRPr sz="1200" kern="1200">
-        <a:solidFill>
-          <a:schemeClr val="tx1"/>
-        </a:solidFill>
-        <a:latin typeface="+mn-lt"/>
-        <a:ea typeface="+mn-ea"/>
-        <a:cs typeface="+mn-cs"/>
-      </a:defRPr>
-    </a:lvl1pPr>
-    <a:lvl2pPr marL="457200" algn="l" defTabSz="914400" rtl="0" eaLnBrk="1" latinLnBrk="0" hangingPunct="1">
-      <a:defRPr sz="1200" kern="1200">
-        <a:solidFill>
-          <a:schemeClr val="tx1"/>
-        </a:solidFill>
-        <a:latin typeface="+mn-lt"/>
-        <a:ea typeface="+mn-ea"/>
-        <a:cs typeface="+mn-cs"/>
-      </a:defRPr>
-    </a:lvl2pPr>
-    <a:lvl3pPr marL="914400" algn="l" defTabSz="914400" rtl="0" eaLnBrk="1" latinLnBrk="0" hangingPunct="1">
-      <a:defRPr sz="1200" kern="1200">
-        <a:solidFill>
-          <a:schemeClr val="tx1"/>
-        </a:solidFill>
-        <a:latin typeface="+mn-lt"/>
-        <a:ea typeface="+mn-ea"/>
-        <a:cs typeface="+mn-cs"/>
-      </a:defRPr>
-    </a:lvl3pPr>
-    <a:lvl4pPr marL="1371600" algn="l" defTabSz="914400" rtl="0" eaLnBrk="1" latinLnBrk="0" hangingPunct="1">
-      <a:defRPr sz="1200" kern="1200">
-        <a:solidFill>
-          <a:schemeClr val="tx1"/>
-        </a:solidFill>
-        <a:latin typeface="+mn-lt"/>
-        <a:ea typeface="+mn-ea"/>
-        <a:cs typeface="+mn-cs"/>
-      </a:defRPr>
-    </a:lvl4pPr>
-    <a:lvl5pPr marL="1828800" algn="l" defTabSz="914400" rtl="0" eaLnBrk="1" latinLnBrk="0" hangingPunct="1">
-      <a:defRPr sz="1200" kern="1200">
-        <a:solidFill>
-          <a:schemeClr val="tx1"/>
-        </a:solidFill>
-        <a:latin typeface="+mn-lt"/>
-        <a:ea typeface="+mn-ea"/>
-        <a:cs typeface="+mn-cs"/>
-      </a:defRPr>
-    </a:lvl5pPr>
-    <a:lvl6pPr marL="2286000" algn="l" defTabSz="914400" rtl="0" eaLnBrk="1" latinLnBrk="0" hangingPunct="1">
-      <a:defRPr sz="1200" kern="1200">
-        <a:solidFill>
-          <a:schemeClr val="tx1"/>
-        </a:solidFill>
-        <a:latin typeface="+mn-lt"/>
-        <a:ea typeface="+mn-ea"/>
-        <a:cs typeface="+mn-cs"/>
-      </a:defRPr>
-    </a:lvl6pPr>
-    <a:lvl7pPr marL="2743200" algn="l" defTabSz="914400" rtl="0" eaLnBrk="1" latinLnBrk="0" hangingPunct="1">
-      <a:defRPr sz="1200" kern="1200">
-        <a:solidFill>
-          <a:schemeClr val="tx1"/>
-        </a:solidFill>
-        <a:latin typeface="+mn-lt"/>
-        <a:ea typeface="+mn-ea"/>
-        <a:cs typeface="+mn-cs"/>
-      </a:defRPr>
-    </a:lvl7pPr>
-    <a:lvl8pPr marL="3200400" algn="l" defTabSz="914400" rtl="0" eaLnBrk="1" latinLnBrk="0" hangingPunct="1">
-      <a:defRPr sz="1200" kern="1200">
-        <a:solidFill>
-          <a:schemeClr val="tx1"/>
-        </a:solidFill>
-        <a:latin typeface="+mn-lt"/>
-        <a:ea typeface="+mn-ea"/>
-        <a:cs typeface="+mn-cs"/>
-      </a:defRPr>
-    </a:lvl8pPr>
-    <a:lvl9pPr marL="3657600" algn="l" defTabSz="914400" rtl="0" eaLnBrk="1" latinLnBrk="0" hangingPunct="1">
-      <a:defRPr sz="1200" kern="1200">
-        <a:solidFill>
-          <a:schemeClr val="tx1"/>
-        </a:solidFill>
-        <a:latin typeface="+mn-lt"/>
-        <a:ea typeface="+mn-ea"/>
-        <a:cs typeface="+mn-cs"/>
-      </a:defRPr>
-    </a:lvl9pPr>
-  </p:notesStyle>
-</p:notesMaster>
-</file>
-
-<file path=ppt/notesSlides/notesSlide1.xml><?xml version="1.0" encoding="utf-8"?>
-<p:notes xmlns:a="http://schemas.openxmlformats.org/drawingml/2006/main" xmlns:r="http://schemas.openxmlformats.org/officeDocument/2006/relationships" xmlns:p="http://schemas.openxmlformats.org/presentationml/2006/main">
-  <p:cSld>
-    <p:spTree>
-      <p:nvGrpSpPr>
-        <p:cNvPr id="1" name=""/>
-        <p:cNvGrpSpPr/>
-        <p:nvPr/>
-      </p:nvGrpSpPr>
-      <p:grpSpPr>
-        <a:xfrm>
-          <a:off x="0" y="0"/>
-          <a:ext cx="0" cy="0"/>
-          <a:chOff x="0" y="0"/>
-          <a:chExt cx="0" cy="0"/>
-        </a:xfrm>
-      </p:grpSpPr>
-      <p:sp>
-        <p:nvSpPr>
-          <p:cNvPr id="2" name="Slide Image Placeholder 1"/>
-          <p:cNvSpPr>
-            <a:spLocks noGrp="1" noRot="1" noChangeAspect="1"/>
-          </p:cNvSpPr>
-          <p:nvPr>
-            <p:ph type="sldImg"/>
-          </p:nvPr>
-        </p:nvSpPr>
-        <p:spPr/>
-      </p:sp>
-      <p:sp>
-        <p:nvSpPr>
-          <p:cNvPr id="3" name="Notes Placeholder 2"/>
-          <p:cNvSpPr>
-            <a:spLocks noGrp="1"/>
-          </p:cNvSpPr>
-          <p:nvPr>
-            <p:ph type="body" idx="1"/>
-          </p:nvPr>
-        </p:nvSpPr>
-        <p:spPr/>
-        <p:txBody>
-          <a:bodyPr/>
-          <a:lstStyle/>
-          <a:p>
-            <a:endParaRPr lang="en-US" dirty="0"/>
-          </a:p>
-        </p:txBody>
-      </p:sp>
-      <p:sp>
-        <p:nvSpPr>
-          <p:cNvPr id="4" name="Slide Number Placeholder 3"/>
-          <p:cNvSpPr>
-            <a:spLocks noGrp="1"/>
-          </p:cNvSpPr>
-          <p:nvPr>
-            <p:ph type="sldNum" sz="quarter" idx="5"/>
-          </p:nvPr>
-        </p:nvSpPr>
-        <p:spPr/>
-        <p:txBody>
-          <a:bodyPr/>
-          <a:lstStyle/>
-          <a:p>
-            <a:fld id="{A285BCF8-5EF9-8940-B577-70583C978942}" type="slidenum">
-              <a:rPr lang="en-US" smtClean="0"/>
-              <a:t>1</a:t>
-            </a:fld>
-            <a:endParaRPr lang="en-US"/>
-          </a:p>
-        </p:txBody>
-      </p:sp>
-    </p:spTree>
-    <p:extLst>
-      <p:ext uri="{BB962C8B-B14F-4D97-AF65-F5344CB8AC3E}">
-        <p14:creationId xmlns:p14="http://schemas.microsoft.com/office/powerpoint/2010/main" val="1073068559"/>
-      </p:ext>
-    </p:extLst>
-  </p:cSld>
-  <p:clrMapOvr>
-    <a:masterClrMapping/>
-  </p:clrMapOvr>
-</p:notes>
 </file>
 
 <file path=ppt/slideLayouts/slideLayout1.xml><?xml version="1.0" encoding="utf-8"?>
@@ -606,9 +154,10 @@
           <a:lstStyle/>
           <a:p>
             <a:r>
-              <a:rPr lang="en-US"/>
+              <a:rPr lang="en-US" smtClean="0"/>
               <a:t>Click to edit Master title style</a:t>
             </a:r>
+            <a:endParaRPr lang="en-US"/>
           </a:p>
         </p:txBody>
       </p:sp>
@@ -724,9 +273,10 @@
           </a:lstStyle>
           <a:p>
             <a:r>
-              <a:rPr lang="en-US"/>
+              <a:rPr lang="en-US" smtClean="0"/>
               <a:t>Click to edit Master subtitle style</a:t>
             </a:r>
+            <a:endParaRPr lang="en-US"/>
           </a:p>
         </p:txBody>
       </p:sp>
@@ -747,7 +297,7 @@
           <a:p>
             <a:fld id="{5BCAD085-E8A6-8845-BD4E-CB4CCA059FC4}" type="datetimeFigureOut">
               <a:rPr lang="en-US" smtClean="0"/>
-              <a:t>4/21/26</a:t>
+              <a:t>1/27/13</a:t>
             </a:fld>
             <a:endParaRPr lang="en-US"/>
           </a:p>
@@ -841,9 +391,10 @@
           <a:lstStyle/>
           <a:p>
             <a:r>
-              <a:rPr lang="en-US"/>
+              <a:rPr lang="en-US" smtClean="0"/>
               <a:t>Click to edit Master title style</a:t>
             </a:r>
+            <a:endParaRPr lang="en-US"/>
           </a:p>
         </p:txBody>
       </p:sp>
@@ -864,37 +415,38 @@
           <a:p>
             <a:pPr lvl="0"/>
             <a:r>
-              <a:rPr lang="en-US"/>
+              <a:rPr lang="en-US" smtClean="0"/>
               <a:t>Click to edit Master text styles</a:t>
             </a:r>
           </a:p>
           <a:p>
             <a:pPr lvl="1"/>
             <a:r>
-              <a:rPr lang="en-US"/>
+              <a:rPr lang="en-US" smtClean="0"/>
               <a:t>Second level</a:t>
             </a:r>
           </a:p>
           <a:p>
             <a:pPr lvl="2"/>
             <a:r>
-              <a:rPr lang="en-US"/>
+              <a:rPr lang="en-US" smtClean="0"/>
               <a:t>Third level</a:t>
             </a:r>
           </a:p>
           <a:p>
             <a:pPr lvl="3"/>
             <a:r>
-              <a:rPr lang="en-US"/>
+              <a:rPr lang="en-US" smtClean="0"/>
               <a:t>Fourth level</a:t>
             </a:r>
           </a:p>
           <a:p>
             <a:pPr lvl="4"/>
             <a:r>
-              <a:rPr lang="en-US"/>
+              <a:rPr lang="en-US" smtClean="0"/>
               <a:t>Fifth level</a:t>
             </a:r>
+            <a:endParaRPr lang="en-US"/>
           </a:p>
         </p:txBody>
       </p:sp>
@@ -915,7 +467,7 @@
           <a:p>
             <a:fld id="{5BCAD085-E8A6-8845-BD4E-CB4CCA059FC4}" type="datetimeFigureOut">
               <a:rPr lang="en-US" smtClean="0"/>
-              <a:t>4/21/26</a:t>
+              <a:t>1/27/13</a:t>
             </a:fld>
             <a:endParaRPr lang="en-US"/>
           </a:p>
@@ -1014,9 +566,10 @@
           <a:lstStyle/>
           <a:p>
             <a:r>
-              <a:rPr lang="en-US"/>
+              <a:rPr lang="en-US" smtClean="0"/>
               <a:t>Click to edit Master title style</a:t>
             </a:r>
+            <a:endParaRPr lang="en-US"/>
           </a:p>
         </p:txBody>
       </p:sp>
@@ -1042,37 +595,38 @@
           <a:p>
             <a:pPr lvl="0"/>
             <a:r>
-              <a:rPr lang="en-US"/>
+              <a:rPr lang="en-US" smtClean="0"/>
               <a:t>Click to edit Master text styles</a:t>
             </a:r>
           </a:p>
           <a:p>
             <a:pPr lvl="1"/>
             <a:r>
-              <a:rPr lang="en-US"/>
+              <a:rPr lang="en-US" smtClean="0"/>
               <a:t>Second level</a:t>
             </a:r>
           </a:p>
           <a:p>
             <a:pPr lvl="2"/>
             <a:r>
-              <a:rPr lang="en-US"/>
+              <a:rPr lang="en-US" smtClean="0"/>
               <a:t>Third level</a:t>
             </a:r>
           </a:p>
           <a:p>
             <a:pPr lvl="3"/>
             <a:r>
-              <a:rPr lang="en-US"/>
+              <a:rPr lang="en-US" smtClean="0"/>
               <a:t>Fourth level</a:t>
             </a:r>
           </a:p>
           <a:p>
             <a:pPr lvl="4"/>
             <a:r>
-              <a:rPr lang="en-US"/>
+              <a:rPr lang="en-US" smtClean="0"/>
               <a:t>Fifth level</a:t>
             </a:r>
+            <a:endParaRPr lang="en-US"/>
           </a:p>
         </p:txBody>
       </p:sp>
@@ -1093,7 +647,7 @@
           <a:p>
             <a:fld id="{5BCAD085-E8A6-8845-BD4E-CB4CCA059FC4}" type="datetimeFigureOut">
               <a:rPr lang="en-US" smtClean="0"/>
-              <a:t>4/21/26</a:t>
+              <a:t>1/27/13</a:t>
             </a:fld>
             <a:endParaRPr lang="en-US"/>
           </a:p>
@@ -1187,9 +741,10 @@
           <a:lstStyle/>
           <a:p>
             <a:r>
-              <a:rPr lang="en-US"/>
+              <a:rPr lang="en-US" smtClean="0"/>
               <a:t>Click to edit Master title style</a:t>
             </a:r>
+            <a:endParaRPr lang="en-US"/>
           </a:p>
         </p:txBody>
       </p:sp>
@@ -1210,37 +765,38 @@
           <a:p>
             <a:pPr lvl="0"/>
             <a:r>
-              <a:rPr lang="en-US"/>
+              <a:rPr lang="en-US" smtClean="0"/>
               <a:t>Click to edit Master text styles</a:t>
             </a:r>
           </a:p>
           <a:p>
             <a:pPr lvl="1"/>
             <a:r>
-              <a:rPr lang="en-US"/>
+              <a:rPr lang="en-US" smtClean="0"/>
               <a:t>Second level</a:t>
             </a:r>
           </a:p>
           <a:p>
             <a:pPr lvl="2"/>
             <a:r>
-              <a:rPr lang="en-US"/>
+              <a:rPr lang="en-US" smtClean="0"/>
               <a:t>Third level</a:t>
             </a:r>
           </a:p>
           <a:p>
             <a:pPr lvl="3"/>
             <a:r>
-              <a:rPr lang="en-US"/>
+              <a:rPr lang="en-US" smtClean="0"/>
               <a:t>Fourth level</a:t>
             </a:r>
           </a:p>
           <a:p>
             <a:pPr lvl="4"/>
             <a:r>
-              <a:rPr lang="en-US"/>
+              <a:rPr lang="en-US" smtClean="0"/>
               <a:t>Fifth level</a:t>
             </a:r>
+            <a:endParaRPr lang="en-US"/>
           </a:p>
         </p:txBody>
       </p:sp>
@@ -1261,7 +817,7 @@
           <a:p>
             <a:fld id="{5BCAD085-E8A6-8845-BD4E-CB4CCA059FC4}" type="datetimeFigureOut">
               <a:rPr lang="en-US" smtClean="0"/>
-              <a:t>4/21/26</a:t>
+              <a:t>1/27/13</a:t>
             </a:fld>
             <a:endParaRPr lang="en-US"/>
           </a:p>
@@ -1364,9 +920,10 @@
           </a:lstStyle>
           <a:p>
             <a:r>
-              <a:rPr lang="en-US"/>
+              <a:rPr lang="en-US" smtClean="0"/>
               <a:t>Click to edit Master title style</a:t>
             </a:r>
+            <a:endParaRPr lang="en-US"/>
           </a:p>
         </p:txBody>
       </p:sp>
@@ -1483,7 +1040,7 @@
           <a:p>
             <a:pPr lvl="0"/>
             <a:r>
-              <a:rPr lang="en-US"/>
+              <a:rPr lang="en-US" smtClean="0"/>
               <a:t>Click to edit Master text styles</a:t>
             </a:r>
           </a:p>
@@ -1506,7 +1063,7 @@
           <a:p>
             <a:fld id="{5BCAD085-E8A6-8845-BD4E-CB4CCA059FC4}" type="datetimeFigureOut">
               <a:rPr lang="en-US" smtClean="0"/>
-              <a:t>4/21/26</a:t>
+              <a:t>1/27/13</a:t>
             </a:fld>
             <a:endParaRPr lang="en-US"/>
           </a:p>
@@ -1600,9 +1157,10 @@
           <a:lstStyle/>
           <a:p>
             <a:r>
-              <a:rPr lang="en-US"/>
+              <a:rPr lang="en-US" smtClean="0"/>
               <a:t>Click to edit Master title style</a:t>
             </a:r>
+            <a:endParaRPr lang="en-US"/>
           </a:p>
         </p:txBody>
       </p:sp>
@@ -1656,37 +1214,38 @@
           <a:p>
             <a:pPr lvl="0"/>
             <a:r>
-              <a:rPr lang="en-US"/>
+              <a:rPr lang="en-US" smtClean="0"/>
               <a:t>Click to edit Master text styles</a:t>
             </a:r>
           </a:p>
           <a:p>
             <a:pPr lvl="1"/>
             <a:r>
-              <a:rPr lang="en-US"/>
+              <a:rPr lang="en-US" smtClean="0"/>
               <a:t>Second level</a:t>
             </a:r>
           </a:p>
           <a:p>
             <a:pPr lvl="2"/>
             <a:r>
-              <a:rPr lang="en-US"/>
+              <a:rPr lang="en-US" smtClean="0"/>
               <a:t>Third level</a:t>
             </a:r>
           </a:p>
           <a:p>
             <a:pPr lvl="3"/>
             <a:r>
-              <a:rPr lang="en-US"/>
+              <a:rPr lang="en-US" smtClean="0"/>
               <a:t>Fourth level</a:t>
             </a:r>
           </a:p>
           <a:p>
             <a:pPr lvl="4"/>
             <a:r>
-              <a:rPr lang="en-US"/>
+              <a:rPr lang="en-US" smtClean="0"/>
               <a:t>Fifth level</a:t>
             </a:r>
+            <a:endParaRPr lang="en-US"/>
           </a:p>
         </p:txBody>
       </p:sp>
@@ -1740,37 +1299,38 @@
           <a:p>
             <a:pPr lvl="0"/>
             <a:r>
-              <a:rPr lang="en-US"/>
+              <a:rPr lang="en-US" smtClean="0"/>
               <a:t>Click to edit Master text styles</a:t>
             </a:r>
           </a:p>
           <a:p>
             <a:pPr lvl="1"/>
             <a:r>
-              <a:rPr lang="en-US"/>
+              <a:rPr lang="en-US" smtClean="0"/>
               <a:t>Second level</a:t>
             </a:r>
           </a:p>
           <a:p>
             <a:pPr lvl="2"/>
             <a:r>
-              <a:rPr lang="en-US"/>
+              <a:rPr lang="en-US" smtClean="0"/>
               <a:t>Third level</a:t>
             </a:r>
           </a:p>
           <a:p>
             <a:pPr lvl="3"/>
             <a:r>
-              <a:rPr lang="en-US"/>
+              <a:rPr lang="en-US" smtClean="0"/>
               <a:t>Fourth level</a:t>
             </a:r>
           </a:p>
           <a:p>
             <a:pPr lvl="4"/>
             <a:r>
-              <a:rPr lang="en-US"/>
+              <a:rPr lang="en-US" smtClean="0"/>
               <a:t>Fifth level</a:t>
             </a:r>
+            <a:endParaRPr lang="en-US"/>
           </a:p>
         </p:txBody>
       </p:sp>
@@ -1791,7 +1351,7 @@
           <a:p>
             <a:fld id="{5BCAD085-E8A6-8845-BD4E-CB4CCA059FC4}" type="datetimeFigureOut">
               <a:rPr lang="en-US" smtClean="0"/>
-              <a:t>4/21/26</a:t>
+              <a:t>1/27/13</a:t>
             </a:fld>
             <a:endParaRPr lang="en-US"/>
           </a:p>
@@ -1889,9 +1449,10 @@
           </a:lstStyle>
           <a:p>
             <a:r>
-              <a:rPr lang="en-US"/>
+              <a:rPr lang="en-US" smtClean="0"/>
               <a:t>Click to edit Master title style</a:t>
             </a:r>
+            <a:endParaRPr lang="en-US"/>
           </a:p>
         </p:txBody>
       </p:sp>
@@ -1954,7 +1515,7 @@
           <a:p>
             <a:pPr lvl="0"/>
             <a:r>
-              <a:rPr lang="en-US"/>
+              <a:rPr lang="en-US" smtClean="0"/>
               <a:t>Click to edit Master text styles</a:t>
             </a:r>
           </a:p>
@@ -2010,37 +1571,38 @@
           <a:p>
             <a:pPr lvl="0"/>
             <a:r>
-              <a:rPr lang="en-US"/>
+              <a:rPr lang="en-US" smtClean="0"/>
               <a:t>Click to edit Master text styles</a:t>
             </a:r>
           </a:p>
           <a:p>
             <a:pPr lvl="1"/>
             <a:r>
-              <a:rPr lang="en-US"/>
+              <a:rPr lang="en-US" smtClean="0"/>
               <a:t>Second level</a:t>
             </a:r>
           </a:p>
           <a:p>
             <a:pPr lvl="2"/>
             <a:r>
-              <a:rPr lang="en-US"/>
+              <a:rPr lang="en-US" smtClean="0"/>
               <a:t>Third level</a:t>
             </a:r>
           </a:p>
           <a:p>
             <a:pPr lvl="3"/>
             <a:r>
-              <a:rPr lang="en-US"/>
+              <a:rPr lang="en-US" smtClean="0"/>
               <a:t>Fourth level</a:t>
             </a:r>
           </a:p>
           <a:p>
             <a:pPr lvl="4"/>
             <a:r>
-              <a:rPr lang="en-US"/>
+              <a:rPr lang="en-US" smtClean="0"/>
               <a:t>Fifth level</a:t>
             </a:r>
+            <a:endParaRPr lang="en-US"/>
           </a:p>
         </p:txBody>
       </p:sp>
@@ -2103,7 +1665,7 @@
           <a:p>
             <a:pPr lvl="0"/>
             <a:r>
-              <a:rPr lang="en-US"/>
+              <a:rPr lang="en-US" smtClean="0"/>
               <a:t>Click to edit Master text styles</a:t>
             </a:r>
           </a:p>
@@ -2159,37 +1721,38 @@
           <a:p>
             <a:pPr lvl="0"/>
             <a:r>
-              <a:rPr lang="en-US"/>
+              <a:rPr lang="en-US" smtClean="0"/>
               <a:t>Click to edit Master text styles</a:t>
             </a:r>
           </a:p>
           <a:p>
             <a:pPr lvl="1"/>
             <a:r>
-              <a:rPr lang="en-US"/>
+              <a:rPr lang="en-US" smtClean="0"/>
               <a:t>Second level</a:t>
             </a:r>
           </a:p>
           <a:p>
             <a:pPr lvl="2"/>
             <a:r>
-              <a:rPr lang="en-US"/>
+              <a:rPr lang="en-US" smtClean="0"/>
               <a:t>Third level</a:t>
             </a:r>
           </a:p>
           <a:p>
             <a:pPr lvl="3"/>
             <a:r>
-              <a:rPr lang="en-US"/>
+              <a:rPr lang="en-US" smtClean="0"/>
               <a:t>Fourth level</a:t>
             </a:r>
           </a:p>
           <a:p>
             <a:pPr lvl="4"/>
             <a:r>
-              <a:rPr lang="en-US"/>
+              <a:rPr lang="en-US" smtClean="0"/>
               <a:t>Fifth level</a:t>
             </a:r>
+            <a:endParaRPr lang="en-US"/>
           </a:p>
         </p:txBody>
       </p:sp>
@@ -2210,7 +1773,7 @@
           <a:p>
             <a:fld id="{5BCAD085-E8A6-8845-BD4E-CB4CCA059FC4}" type="datetimeFigureOut">
               <a:rPr lang="en-US" smtClean="0"/>
-              <a:t>4/21/26</a:t>
+              <a:t>1/27/13</a:t>
             </a:fld>
             <a:endParaRPr lang="en-US"/>
           </a:p>
@@ -2304,9 +1867,10 @@
           <a:lstStyle/>
           <a:p>
             <a:r>
-              <a:rPr lang="en-US"/>
+              <a:rPr lang="en-US" smtClean="0"/>
               <a:t>Click to edit Master title style</a:t>
             </a:r>
+            <a:endParaRPr lang="en-US"/>
           </a:p>
         </p:txBody>
       </p:sp>
@@ -2327,7 +1891,7 @@
           <a:p>
             <a:fld id="{5BCAD085-E8A6-8845-BD4E-CB4CCA059FC4}" type="datetimeFigureOut">
               <a:rPr lang="en-US" smtClean="0"/>
-              <a:t>4/21/26</a:t>
+              <a:t>1/27/13</a:t>
             </a:fld>
             <a:endParaRPr lang="en-US"/>
           </a:p>
@@ -2422,7 +1986,7 @@
           <a:p>
             <a:fld id="{5BCAD085-E8A6-8845-BD4E-CB4CCA059FC4}" type="datetimeFigureOut">
               <a:rPr lang="en-US" smtClean="0"/>
-              <a:t>4/21/26</a:t>
+              <a:t>1/27/13</a:t>
             </a:fld>
             <a:endParaRPr lang="en-US"/>
           </a:p>
@@ -2525,9 +2089,10 @@
           </a:lstStyle>
           <a:p>
             <a:r>
-              <a:rPr lang="en-US"/>
+              <a:rPr lang="en-US" smtClean="0"/>
               <a:t>Click to edit Master title style</a:t>
             </a:r>
+            <a:endParaRPr lang="en-US"/>
           </a:p>
         </p:txBody>
       </p:sp>
@@ -2581,37 +2146,38 @@
           <a:p>
             <a:pPr lvl="0"/>
             <a:r>
-              <a:rPr lang="en-US"/>
+              <a:rPr lang="en-US" smtClean="0"/>
               <a:t>Click to edit Master text styles</a:t>
             </a:r>
           </a:p>
           <a:p>
             <a:pPr lvl="1"/>
             <a:r>
-              <a:rPr lang="en-US"/>
+              <a:rPr lang="en-US" smtClean="0"/>
               <a:t>Second level</a:t>
             </a:r>
           </a:p>
           <a:p>
             <a:pPr lvl="2"/>
             <a:r>
-              <a:rPr lang="en-US"/>
+              <a:rPr lang="en-US" smtClean="0"/>
               <a:t>Third level</a:t>
             </a:r>
           </a:p>
           <a:p>
             <a:pPr lvl="3"/>
             <a:r>
-              <a:rPr lang="en-US"/>
+              <a:rPr lang="en-US" smtClean="0"/>
               <a:t>Fourth level</a:t>
             </a:r>
           </a:p>
           <a:p>
             <a:pPr lvl="4"/>
             <a:r>
-              <a:rPr lang="en-US"/>
+              <a:rPr lang="en-US" smtClean="0"/>
               <a:t>Fifth level</a:t>
             </a:r>
+            <a:endParaRPr lang="en-US"/>
           </a:p>
         </p:txBody>
       </p:sp>
@@ -2674,7 +2240,7 @@
           <a:p>
             <a:pPr lvl="0"/>
             <a:r>
-              <a:rPr lang="en-US"/>
+              <a:rPr lang="en-US" smtClean="0"/>
               <a:t>Click to edit Master text styles</a:t>
             </a:r>
           </a:p>
@@ -2697,7 +2263,7 @@
           <a:p>
             <a:fld id="{5BCAD085-E8A6-8845-BD4E-CB4CCA059FC4}" type="datetimeFigureOut">
               <a:rPr lang="en-US" smtClean="0"/>
-              <a:t>4/21/26</a:t>
+              <a:t>1/27/13</a:t>
             </a:fld>
             <a:endParaRPr lang="en-US"/>
           </a:p>
@@ -2800,9 +2366,10 @@
           </a:lstStyle>
           <a:p>
             <a:r>
-              <a:rPr lang="en-US"/>
+              <a:rPr lang="en-US" smtClean="0"/>
               <a:t>Click to edit Master title style</a:t>
             </a:r>
+            <a:endParaRPr lang="en-US"/>
           </a:p>
         </p:txBody>
       </p:sp>
@@ -2926,7 +2493,7 @@
           <a:p>
             <a:pPr lvl="0"/>
             <a:r>
-              <a:rPr lang="en-US"/>
+              <a:rPr lang="en-US" smtClean="0"/>
               <a:t>Click to edit Master text styles</a:t>
             </a:r>
           </a:p>
@@ -2949,7 +2516,7 @@
           <a:p>
             <a:fld id="{5BCAD085-E8A6-8845-BD4E-CB4CCA059FC4}" type="datetimeFigureOut">
               <a:rPr lang="en-US" smtClean="0"/>
-              <a:t>4/21/26</a:t>
+              <a:t>1/27/13</a:t>
             </a:fld>
             <a:endParaRPr lang="en-US"/>
           </a:p>
@@ -3058,9 +2625,10 @@
           <a:lstStyle/>
           <a:p>
             <a:r>
-              <a:rPr lang="en-US"/>
+              <a:rPr lang="en-US" smtClean="0"/>
               <a:t>Click to edit Master title style</a:t>
             </a:r>
+            <a:endParaRPr lang="en-US"/>
           </a:p>
         </p:txBody>
       </p:sp>
@@ -3091,37 +2659,38 @@
           <a:p>
             <a:pPr lvl="0"/>
             <a:r>
-              <a:rPr lang="en-US"/>
+              <a:rPr lang="en-US" smtClean="0"/>
               <a:t>Click to edit Master text styles</a:t>
             </a:r>
           </a:p>
           <a:p>
             <a:pPr lvl="1"/>
             <a:r>
-              <a:rPr lang="en-US"/>
+              <a:rPr lang="en-US" smtClean="0"/>
               <a:t>Second level</a:t>
             </a:r>
           </a:p>
           <a:p>
             <a:pPr lvl="2"/>
             <a:r>
-              <a:rPr lang="en-US"/>
+              <a:rPr lang="en-US" smtClean="0"/>
               <a:t>Third level</a:t>
             </a:r>
           </a:p>
           <a:p>
             <a:pPr lvl="3"/>
             <a:r>
-              <a:rPr lang="en-US"/>
+              <a:rPr lang="en-US" smtClean="0"/>
               <a:t>Fourth level</a:t>
             </a:r>
           </a:p>
           <a:p>
             <a:pPr lvl="4"/>
             <a:r>
-              <a:rPr lang="en-US"/>
+              <a:rPr lang="en-US" smtClean="0"/>
               <a:t>Fifth level</a:t>
             </a:r>
+            <a:endParaRPr lang="en-US"/>
           </a:p>
         </p:txBody>
       </p:sp>
@@ -3160,7 +2729,7 @@
           <a:p>
             <a:fld id="{5BCAD085-E8A6-8845-BD4E-CB4CCA059FC4}" type="datetimeFigureOut">
               <a:rPr lang="en-US" smtClean="0"/>
-              <a:t>4/21/26</a:t>
+              <a:t>1/27/13</a:t>
             </a:fld>
             <a:endParaRPr lang="en-US"/>
           </a:p>
@@ -3519,7 +3088,7 @@
 </file>
 
 <file path=ppt/slides/slide1.xml><?xml version="1.0" encoding="utf-8"?>
-<p:sld xmlns:a="http://schemas.openxmlformats.org/drawingml/2006/main" xmlns:r="http://schemas.openxmlformats.org/officeDocument/2006/relationships" xmlns:p="http://schemas.openxmlformats.org/presentationml/2006/main">
+<p:sld xmlns:a="http://schemas.openxmlformats.org/drawingml/2006/main" xmlns:p="http://schemas.openxmlformats.org/presentationml/2006/main" xmlns:r="http://schemas.openxmlformats.org/officeDocument/2006/relationships">
   <p:cSld>
     <p:spTree>
       <p:nvGrpSpPr>
@@ -3527,14 +3096,7 @@
         <p:cNvGrpSpPr/>
         <p:nvPr/>
       </p:nvGrpSpPr>
-      <p:grpSpPr>
-        <a:xfrm>
-          <a:off x="0" y="0"/>
-          <a:ext cx="0" cy="0"/>
-          <a:chOff x="0" y="0"/>
-          <a:chExt cx="0" cy="0"/>
-        </a:xfrm>
-      </p:grpSpPr>
+      <p:grpSpPr/>
       <p:sp>
         <p:nvSpPr>
           <p:cNvPr id="2" name="TextBox 1"/>
@@ -3600,7 +3162,6 @@
               </a:defRPr>
             </a:pPr>
             <a:r>
-              <a:rPr dirty="0"/>
               <a:t>Comparing classifiers and regressors across two datasets</a:t>
             </a:r>
           </a:p>
@@ -3615,7 +3176,7 @@
         <p:spPr>
           <a:xfrm>
             <a:off x="640080" y="5669280"/>
-            <a:ext cx="7527125" cy="523220"/>
+            <a:ext cx="10972800" cy="548640"/>
           </a:xfrm>
           <a:prstGeom prst="rect">
             <a:avLst/>
@@ -3636,41 +3197,7 @@
               </a:defRPr>
             </a:pPr>
             <a:r>
-              <a:rPr dirty="0"/>
-              <a:t>Tanay Malavia</a:t>
-            </a:r>
-            <a:r>
-              <a:rPr lang="en-US" dirty="0"/>
-              <a:t> | Darpan Attri | Andres Ramos | Harika Yendapalli</a:t>
-            </a:r>
-          </a:p>
-          <a:p>
-            <a:pPr>
-              <a:defRPr sz="1400">
-                <a:solidFill>
-                  <a:srgbClr val="555555"/>
-                </a:solidFill>
-              </a:defRPr>
-            </a:pPr>
-            <a:r>
-              <a:rPr dirty="0"/>
-              <a:t>CSCI 164  •  Spring 2026  •  </a:t>
-            </a:r>
-            <a:r>
-              <a:rPr dirty="0" err="1"/>
-              <a:t>github.com</a:t>
-            </a:r>
-            <a:r>
-              <a:rPr dirty="0"/>
-              <a:t>/</a:t>
-            </a:r>
-            <a:r>
-              <a:rPr dirty="0" err="1"/>
-              <a:t>malaviatanay</a:t>
-            </a:r>
-            <a:r>
-              <a:rPr dirty="0"/>
-              <a:t>/Applied-Machine-Learning-with-scikit-learn</a:t>
+              <a:t>Tanay Malavia, Darpan Attri, Andres Ramos, Harika Yendapalli  •  CSCI 164  •  Spring 2026  •  github.com/malaviatanay/Applied-Machine-Learning-with-scikit-learn</a:t>
             </a:r>
           </a:p>
         </p:txBody>
@@ -3684,7 +3211,7 @@
 </file>
 
 <file path=ppt/slides/slide10.xml><?xml version="1.0" encoding="utf-8"?>
-<p:sld xmlns:a="http://schemas.openxmlformats.org/drawingml/2006/main" xmlns:r="http://schemas.openxmlformats.org/officeDocument/2006/relationships" xmlns:p="http://schemas.openxmlformats.org/presentationml/2006/main">
+<p:sld xmlns:a="http://schemas.openxmlformats.org/drawingml/2006/main" xmlns:p="http://schemas.openxmlformats.org/presentationml/2006/main" xmlns:r="http://schemas.openxmlformats.org/officeDocument/2006/relationships">
   <p:cSld>
     <p:spTree>
       <p:nvGrpSpPr>
@@ -3692,14 +3219,7 @@
         <p:cNvGrpSpPr/>
         <p:nvPr/>
       </p:nvGrpSpPr>
-      <p:grpSpPr>
-        <a:xfrm>
-          <a:off x="0" y="0"/>
-          <a:ext cx="0" cy="0"/>
-          <a:chOff x="0" y="0"/>
-          <a:chExt cx="0" cy="0"/>
-        </a:xfrm>
-      </p:grpSpPr>
+      <p:grpSpPr/>
       <p:sp>
         <p:nvSpPr>
           <p:cNvPr id="2" name="TextBox 1"/>
@@ -3779,7 +3299,7 @@
 </file>
 
 <file path=ppt/slides/slide2.xml><?xml version="1.0" encoding="utf-8"?>
-<p:sld xmlns:a="http://schemas.openxmlformats.org/drawingml/2006/main" xmlns:r="http://schemas.openxmlformats.org/officeDocument/2006/relationships" xmlns:p="http://schemas.openxmlformats.org/presentationml/2006/main">
+<p:sld xmlns:a="http://schemas.openxmlformats.org/drawingml/2006/main" xmlns:p="http://schemas.openxmlformats.org/presentationml/2006/main" xmlns:r="http://schemas.openxmlformats.org/officeDocument/2006/relationships">
   <p:cSld>
     <p:spTree>
       <p:nvGrpSpPr>
@@ -3787,14 +3307,7 @@
         <p:cNvGrpSpPr/>
         <p:nvPr/>
       </p:nvGrpSpPr>
-      <p:grpSpPr>
-        <a:xfrm>
-          <a:off x="0" y="0"/>
-          <a:ext cx="0" cy="0"/>
-          <a:chOff x="0" y="0"/>
-          <a:chExt cx="0" cy="0"/>
-        </a:xfrm>
-      </p:grpSpPr>
+      <p:grpSpPr/>
       <p:sp>
         <p:nvSpPr>
           <p:cNvPr id="2" name="TextBox 1"/>
@@ -3922,7 +3435,7 @@
 </file>
 
 <file path=ppt/slides/slide3.xml><?xml version="1.0" encoding="utf-8"?>
-<p:sld xmlns:a="http://schemas.openxmlformats.org/drawingml/2006/main" xmlns:r="http://schemas.openxmlformats.org/officeDocument/2006/relationships" xmlns:p="http://schemas.openxmlformats.org/presentationml/2006/main">
+<p:sld xmlns:a="http://schemas.openxmlformats.org/drawingml/2006/main" xmlns:p="http://schemas.openxmlformats.org/presentationml/2006/main" xmlns:r="http://schemas.openxmlformats.org/officeDocument/2006/relationships">
   <p:cSld>
     <p:spTree>
       <p:nvGrpSpPr>
@@ -3930,14 +3443,7 @@
         <p:cNvGrpSpPr/>
         <p:nvPr/>
       </p:nvGrpSpPr>
-      <p:grpSpPr>
-        <a:xfrm>
-          <a:off x="0" y="0"/>
-          <a:ext cx="0" cy="0"/>
-          <a:chOff x="0" y="0"/>
-          <a:chExt cx="0" cy="0"/>
-        </a:xfrm>
-      </p:grpSpPr>
+      <p:grpSpPr/>
       <p:sp>
         <p:nvSpPr>
           <p:cNvPr id="2" name="TextBox 1"/>
@@ -3992,34 +3498,10 @@
                 <a:tableStyleId>{5C22544A-7EE6-4342-B048-85BDC9FD1C3A}</a:tableStyleId>
               </a:tblPr>
               <a:tblGrid>
-                <a:gridCol w="2743200">
-                  <a:extLst>
-                    <a:ext uri="{9D8B030D-6E8A-4147-A177-3AD203B41FA5}">
-                      <a16:colId xmlns:a16="http://schemas.microsoft.com/office/drawing/2014/main" val="20000"/>
-                    </a:ext>
-                  </a:extLst>
-                </a:gridCol>
-                <a:gridCol w="2743200">
-                  <a:extLst>
-                    <a:ext uri="{9D8B030D-6E8A-4147-A177-3AD203B41FA5}">
-                      <a16:colId xmlns:a16="http://schemas.microsoft.com/office/drawing/2014/main" val="20001"/>
-                    </a:ext>
-                  </a:extLst>
-                </a:gridCol>
-                <a:gridCol w="2743200">
-                  <a:extLst>
-                    <a:ext uri="{9D8B030D-6E8A-4147-A177-3AD203B41FA5}">
-                      <a16:colId xmlns:a16="http://schemas.microsoft.com/office/drawing/2014/main" val="20002"/>
-                    </a:ext>
-                  </a:extLst>
-                </a:gridCol>
-                <a:gridCol w="2743200">
-                  <a:extLst>
-                    <a:ext uri="{9D8B030D-6E8A-4147-A177-3AD203B41FA5}">
-                      <a16:colId xmlns:a16="http://schemas.microsoft.com/office/drawing/2014/main" val="20003"/>
-                    </a:ext>
-                  </a:extLst>
-                </a:gridCol>
+                <a:gridCol w="2743200"/>
+                <a:gridCol w="2743200"/>
+                <a:gridCol w="2743200"/>
+                <a:gridCol w="2743200"/>
               </a:tblGrid>
               <a:tr h="457200">
                 <a:tc>
@@ -4028,7 +3510,7 @@
                     <a:lstStyle/>
                     <a:p>
                       <a:r>
-                        <a:rPr sz="1400" b="1">
+                        <a:rPr b="1" sz="1400">
                           <a:solidFill>
                             <a:srgbClr val="FFFFFF"/>
                           </a:solidFill>
@@ -4049,7 +3531,7 @@
                     <a:lstStyle/>
                     <a:p>
                       <a:r>
-                        <a:rPr sz="1400" b="1">
+                        <a:rPr b="1" sz="1400">
                           <a:solidFill>
                             <a:srgbClr val="FFFFFF"/>
                           </a:solidFill>
@@ -4070,7 +3552,7 @@
                     <a:lstStyle/>
                     <a:p>
                       <a:r>
-                        <a:rPr sz="1400" b="1">
+                        <a:rPr b="1" sz="1400">
                           <a:solidFill>
                             <a:srgbClr val="FFFFFF"/>
                           </a:solidFill>
@@ -4091,7 +3573,7 @@
                     <a:lstStyle/>
                     <a:p>
                       <a:r>
-                        <a:rPr sz="1400" b="1">
+                        <a:rPr b="1" sz="1400">
                           <a:solidFill>
                             <a:srgbClr val="FFFFFF"/>
                           </a:solidFill>
@@ -4106,11 +3588,6 @@
                     </a:solidFill>
                   </a:tcPr>
                 </a:tc>
-                <a:extLst>
-                  <a:ext uri="{0D108BD9-81ED-4DB2-BD59-A6C34878D82A}">
-                    <a16:rowId xmlns:a16="http://schemas.microsoft.com/office/drawing/2014/main" val="10000"/>
-                  </a:ext>
-                </a:extLst>
               </a:tr>
               <a:tr h="457200">
                 <a:tc>
@@ -4181,11 +3658,6 @@
                   </a:txBody>
                   <a:tcPr/>
                 </a:tc>
-                <a:extLst>
-                  <a:ext uri="{0D108BD9-81ED-4DB2-BD59-A6C34878D82A}">
-                    <a16:rowId xmlns:a16="http://schemas.microsoft.com/office/drawing/2014/main" val="10001"/>
-                  </a:ext>
-                </a:extLst>
               </a:tr>
               <a:tr h="457200">
                 <a:tc>
@@ -4256,11 +3728,6 @@
                   </a:txBody>
                   <a:tcPr/>
                 </a:tc>
-                <a:extLst>
-                  <a:ext uri="{0D108BD9-81ED-4DB2-BD59-A6C34878D82A}">
-                    <a16:rowId xmlns:a16="http://schemas.microsoft.com/office/drawing/2014/main" val="10002"/>
-                  </a:ext>
-                </a:extLst>
               </a:tr>
             </a:tbl>
           </a:graphicData>
@@ -4335,8 +3802,8 @@
         </p:blipFill>
         <p:spPr>
           <a:xfrm>
-            <a:off x="8029707" y="3069619"/>
-            <a:ext cx="3373680" cy="3102581"/>
+            <a:off x="7498079" y="4206240"/>
+            <a:ext cx="4389120" cy="4036423"/>
           </a:xfrm>
           <a:prstGeom prst="rect">
             <a:avLst/>
@@ -4352,7 +3819,7 @@
 </file>
 
 <file path=ppt/slides/slide4.xml><?xml version="1.0" encoding="utf-8"?>
-<p:sld xmlns:a="http://schemas.openxmlformats.org/drawingml/2006/main" xmlns:r="http://schemas.openxmlformats.org/officeDocument/2006/relationships" xmlns:p="http://schemas.openxmlformats.org/presentationml/2006/main">
+<p:sld xmlns:a="http://schemas.openxmlformats.org/drawingml/2006/main" xmlns:p="http://schemas.openxmlformats.org/presentationml/2006/main" xmlns:r="http://schemas.openxmlformats.org/officeDocument/2006/relationships">
   <p:cSld>
     <p:spTree>
       <p:nvGrpSpPr>
@@ -4360,14 +3827,7 @@
         <p:cNvGrpSpPr/>
         <p:nvPr/>
       </p:nvGrpSpPr>
-      <p:grpSpPr>
-        <a:xfrm>
-          <a:off x="0" y="0"/>
-          <a:ext cx="0" cy="0"/>
-          <a:chOff x="0" y="0"/>
-          <a:chExt cx="0" cy="0"/>
-        </a:xfrm>
-      </p:grpSpPr>
+      <p:grpSpPr/>
       <p:sp>
         <p:nvSpPr>
           <p:cNvPr id="2" name="TextBox 1"/>
@@ -4510,7 +3970,6 @@
                 </a:solidFill>
               </a:defRPr>
             </a:pPr>
-            <a:endParaRPr/>
           </a:p>
           <a:p>
             <a:pPr>
@@ -4568,7 +4027,6 @@
                 </a:solidFill>
               </a:defRPr>
             </a:pPr>
-            <a:endParaRPr/>
           </a:p>
           <a:p>
             <a:pPr>
@@ -4596,7 +4054,7 @@
 </file>
 
 <file path=ppt/slides/slide5.xml><?xml version="1.0" encoding="utf-8"?>
-<p:sld xmlns:a="http://schemas.openxmlformats.org/drawingml/2006/main" xmlns:r="http://schemas.openxmlformats.org/officeDocument/2006/relationships" xmlns:p="http://schemas.openxmlformats.org/presentationml/2006/main">
+<p:sld xmlns:a="http://schemas.openxmlformats.org/drawingml/2006/main" xmlns:p="http://schemas.openxmlformats.org/presentationml/2006/main" xmlns:r="http://schemas.openxmlformats.org/officeDocument/2006/relationships">
   <p:cSld>
     <p:spTree>
       <p:nvGrpSpPr>
@@ -4604,14 +4062,7 @@
         <p:cNvGrpSpPr/>
         <p:nvPr/>
       </p:nvGrpSpPr>
-      <p:grpSpPr>
-        <a:xfrm>
-          <a:off x="0" y="0"/>
-          <a:ext cx="0" cy="0"/>
-          <a:chOff x="0" y="0"/>
-          <a:chExt cx="0" cy="0"/>
-        </a:xfrm>
-      </p:grpSpPr>
+      <p:grpSpPr/>
       <p:sp>
         <p:nvSpPr>
           <p:cNvPr id="2" name="TextBox 1"/>
@@ -4666,20 +4117,8 @@
                 <a:tableStyleId>{5C22544A-7EE6-4342-B048-85BDC9FD1C3A}</a:tableStyleId>
               </a:tblPr>
               <a:tblGrid>
-                <a:gridCol w="5486400">
-                  <a:extLst>
-                    <a:ext uri="{9D8B030D-6E8A-4147-A177-3AD203B41FA5}">
-                      <a16:colId xmlns:a16="http://schemas.microsoft.com/office/drawing/2014/main" val="20000"/>
-                    </a:ext>
-                  </a:extLst>
-                </a:gridCol>
-                <a:gridCol w="5486400">
-                  <a:extLst>
-                    <a:ext uri="{9D8B030D-6E8A-4147-A177-3AD203B41FA5}">
-                      <a16:colId xmlns:a16="http://schemas.microsoft.com/office/drawing/2014/main" val="20001"/>
-                    </a:ext>
-                  </a:extLst>
-                </a:gridCol>
+                <a:gridCol w="5486400"/>
+                <a:gridCol w="5486400"/>
               </a:tblGrid>
               <a:tr h="457200">
                 <a:tc>
@@ -4688,7 +4127,7 @@
                     <a:lstStyle/>
                     <a:p>
                       <a:r>
-                        <a:rPr sz="1400" b="1">
+                        <a:rPr b="1" sz="1400">
                           <a:solidFill>
                             <a:srgbClr val="FFFFFF"/>
                           </a:solidFill>
@@ -4709,7 +4148,7 @@
                     <a:lstStyle/>
                     <a:p>
                       <a:r>
-                        <a:rPr sz="1400" b="1">
+                        <a:rPr b="1" sz="1400">
                           <a:solidFill>
                             <a:srgbClr val="FFFFFF"/>
                           </a:solidFill>
@@ -4724,11 +4163,6 @@
                     </a:solidFill>
                   </a:tcPr>
                 </a:tc>
-                <a:extLst>
-                  <a:ext uri="{0D108BD9-81ED-4DB2-BD59-A6C34878D82A}">
-                    <a16:rowId xmlns:a16="http://schemas.microsoft.com/office/drawing/2014/main" val="10000"/>
-                  </a:ext>
-                </a:extLst>
               </a:tr>
               <a:tr h="457200">
                 <a:tc>
@@ -4765,11 +4199,6 @@
                   </a:txBody>
                   <a:tcPr/>
                 </a:tc>
-                <a:extLst>
-                  <a:ext uri="{0D108BD9-81ED-4DB2-BD59-A6C34878D82A}">
-                    <a16:rowId xmlns:a16="http://schemas.microsoft.com/office/drawing/2014/main" val="10001"/>
-                  </a:ext>
-                </a:extLst>
               </a:tr>
               <a:tr h="457200">
                 <a:tc>
@@ -4806,11 +4235,6 @@
                   </a:txBody>
                   <a:tcPr/>
                 </a:tc>
-                <a:extLst>
-                  <a:ext uri="{0D108BD9-81ED-4DB2-BD59-A6C34878D82A}">
-                    <a16:rowId xmlns:a16="http://schemas.microsoft.com/office/drawing/2014/main" val="10002"/>
-                  </a:ext>
-                </a:extLst>
               </a:tr>
             </a:tbl>
           </a:graphicData>
@@ -4893,7 +4317,6 @@
                 </a:solidFill>
               </a:defRPr>
             </a:pPr>
-            <a:endParaRPr/>
           </a:p>
           <a:p>
             <a:pPr>
@@ -4921,7 +4344,7 @@
 </file>
 
 <file path=ppt/slides/slide6.xml><?xml version="1.0" encoding="utf-8"?>
-<p:sld xmlns:a="http://schemas.openxmlformats.org/drawingml/2006/main" xmlns:r="http://schemas.openxmlformats.org/officeDocument/2006/relationships" xmlns:p="http://schemas.openxmlformats.org/presentationml/2006/main">
+<p:sld xmlns:a="http://schemas.openxmlformats.org/drawingml/2006/main" xmlns:p="http://schemas.openxmlformats.org/presentationml/2006/main" xmlns:r="http://schemas.openxmlformats.org/officeDocument/2006/relationships">
   <p:cSld>
     <p:spTree>
       <p:nvGrpSpPr>
@@ -4929,14 +4352,7 @@
         <p:cNvGrpSpPr/>
         <p:nvPr/>
       </p:nvGrpSpPr>
-      <p:grpSpPr>
-        <a:xfrm>
-          <a:off x="0" y="0"/>
-          <a:ext cx="0" cy="0"/>
-          <a:chOff x="0" y="0"/>
-          <a:chExt cx="0" cy="0"/>
-        </a:xfrm>
-      </p:grpSpPr>
+      <p:grpSpPr/>
       <p:sp>
         <p:nvSpPr>
           <p:cNvPr id="2" name="TextBox 1"/>
@@ -4982,7 +4398,7 @@
         </p:nvGraphicFramePr>
         <p:xfrm>
           <a:off x="548640" y="1280160"/>
-          <a:ext cx="6583680" cy="1722120"/>
+          <a:ext cx="6583680" cy="1645920"/>
         </p:xfrm>
         <a:graphic>
           <a:graphicData uri="http://schemas.openxmlformats.org/drawingml/2006/table">
@@ -4991,48 +4407,12 @@
                 <a:tableStyleId>{5C22544A-7EE6-4342-B048-85BDC9FD1C3A}</a:tableStyleId>
               </a:tblPr>
               <a:tblGrid>
-                <a:gridCol w="1097280">
-                  <a:extLst>
-                    <a:ext uri="{9D8B030D-6E8A-4147-A177-3AD203B41FA5}">
-                      <a16:colId xmlns:a16="http://schemas.microsoft.com/office/drawing/2014/main" val="20000"/>
-                    </a:ext>
-                  </a:extLst>
-                </a:gridCol>
-                <a:gridCol w="1097280">
-                  <a:extLst>
-                    <a:ext uri="{9D8B030D-6E8A-4147-A177-3AD203B41FA5}">
-                      <a16:colId xmlns:a16="http://schemas.microsoft.com/office/drawing/2014/main" val="20001"/>
-                    </a:ext>
-                  </a:extLst>
-                </a:gridCol>
-                <a:gridCol w="1097280">
-                  <a:extLst>
-                    <a:ext uri="{9D8B030D-6E8A-4147-A177-3AD203B41FA5}">
-                      <a16:colId xmlns:a16="http://schemas.microsoft.com/office/drawing/2014/main" val="20002"/>
-                    </a:ext>
-                  </a:extLst>
-                </a:gridCol>
-                <a:gridCol w="1097280">
-                  <a:extLst>
-                    <a:ext uri="{9D8B030D-6E8A-4147-A177-3AD203B41FA5}">
-                      <a16:colId xmlns:a16="http://schemas.microsoft.com/office/drawing/2014/main" val="20003"/>
-                    </a:ext>
-                  </a:extLst>
-                </a:gridCol>
-                <a:gridCol w="1097280">
-                  <a:extLst>
-                    <a:ext uri="{9D8B030D-6E8A-4147-A177-3AD203B41FA5}">
-                      <a16:colId xmlns:a16="http://schemas.microsoft.com/office/drawing/2014/main" val="20004"/>
-                    </a:ext>
-                  </a:extLst>
-                </a:gridCol>
-                <a:gridCol w="1097280">
-                  <a:extLst>
-                    <a:ext uri="{9D8B030D-6E8A-4147-A177-3AD203B41FA5}">
-                      <a16:colId xmlns:a16="http://schemas.microsoft.com/office/drawing/2014/main" val="20005"/>
-                    </a:ext>
-                  </a:extLst>
-                </a:gridCol>
+                <a:gridCol w="1097280"/>
+                <a:gridCol w="1097280"/>
+                <a:gridCol w="1097280"/>
+                <a:gridCol w="1097280"/>
+                <a:gridCol w="1097280"/>
+                <a:gridCol w="1097280"/>
               </a:tblGrid>
               <a:tr h="411480">
                 <a:tc>
@@ -5041,7 +4421,7 @@
                     <a:lstStyle/>
                     <a:p>
                       <a:r>
-                        <a:rPr sz="1400" b="1">
+                        <a:rPr b="1" sz="1400">
                           <a:solidFill>
                             <a:srgbClr val="FFFFFF"/>
                           </a:solidFill>
@@ -5062,7 +4442,7 @@
                     <a:lstStyle/>
                     <a:p>
                       <a:r>
-                        <a:rPr sz="1400" b="1">
+                        <a:rPr b="1" sz="1400">
                           <a:solidFill>
                             <a:srgbClr val="FFFFFF"/>
                           </a:solidFill>
@@ -5083,7 +4463,7 @@
                     <a:lstStyle/>
                     <a:p>
                       <a:r>
-                        <a:rPr sz="1400" b="1">
+                        <a:rPr b="1" sz="1400">
                           <a:solidFill>
                             <a:srgbClr val="FFFFFF"/>
                           </a:solidFill>
@@ -5104,7 +4484,7 @@
                     <a:lstStyle/>
                     <a:p>
                       <a:r>
-                        <a:rPr sz="1400" b="1">
+                        <a:rPr b="1" sz="1400">
                           <a:solidFill>
                             <a:srgbClr val="FFFFFF"/>
                           </a:solidFill>
@@ -5125,7 +4505,7 @@
                     <a:lstStyle/>
                     <a:p>
                       <a:r>
-                        <a:rPr sz="1400" b="1">
+                        <a:rPr b="1" sz="1400">
                           <a:solidFill>
                             <a:srgbClr val="FFFFFF"/>
                           </a:solidFill>
@@ -5146,7 +4526,7 @@
                     <a:lstStyle/>
                     <a:p>
                       <a:r>
-                        <a:rPr sz="1400" b="1">
+                        <a:rPr b="1" sz="1400">
                           <a:solidFill>
                             <a:srgbClr val="FFFFFF"/>
                           </a:solidFill>
@@ -5161,11 +4541,6 @@
                     </a:solidFill>
                   </a:tcPr>
                 </a:tc>
-                <a:extLst>
-                  <a:ext uri="{0D108BD9-81ED-4DB2-BD59-A6C34878D82A}">
-                    <a16:rowId xmlns:a16="http://schemas.microsoft.com/office/drawing/2014/main" val="10000"/>
-                  </a:ext>
-                </a:extLst>
               </a:tr>
               <a:tr h="411480">
                 <a:tc>
@@ -5270,11 +4645,6 @@
                   </a:txBody>
                   <a:tcPr/>
                 </a:tc>
-                <a:extLst>
-                  <a:ext uri="{0D108BD9-81ED-4DB2-BD59-A6C34878D82A}">
-                    <a16:rowId xmlns:a16="http://schemas.microsoft.com/office/drawing/2014/main" val="10001"/>
-                  </a:ext>
-                </a:extLst>
               </a:tr>
               <a:tr h="411480">
                 <a:tc>
@@ -5379,11 +4749,6 @@
                   </a:txBody>
                   <a:tcPr/>
                 </a:tc>
-                <a:extLst>
-                  <a:ext uri="{0D108BD9-81ED-4DB2-BD59-A6C34878D82A}">
-                    <a16:rowId xmlns:a16="http://schemas.microsoft.com/office/drawing/2014/main" val="10002"/>
-                  </a:ext>
-                </a:extLst>
               </a:tr>
               <a:tr h="411480">
                 <a:tc>
@@ -5488,11 +4853,6 @@
                   </a:txBody>
                   <a:tcPr/>
                 </a:tc>
-                <a:extLst>
-                  <a:ext uri="{0D108BD9-81ED-4DB2-BD59-A6C34878D82A}">
-                    <a16:rowId xmlns:a16="http://schemas.microsoft.com/office/drawing/2014/main" val="10003"/>
-                  </a:ext>
-                </a:extLst>
               </a:tr>
             </a:tbl>
           </a:graphicData>
@@ -5599,7 +4959,7 @@
 </file>
 
 <file path=ppt/slides/slide7.xml><?xml version="1.0" encoding="utf-8"?>
-<p:sld xmlns:a="http://schemas.openxmlformats.org/drawingml/2006/main" xmlns:r="http://schemas.openxmlformats.org/officeDocument/2006/relationships" xmlns:p="http://schemas.openxmlformats.org/presentationml/2006/main">
+<p:sld xmlns:a="http://schemas.openxmlformats.org/drawingml/2006/main" xmlns:p="http://schemas.openxmlformats.org/presentationml/2006/main" xmlns:r="http://schemas.openxmlformats.org/officeDocument/2006/relationships">
   <p:cSld>
     <p:spTree>
       <p:nvGrpSpPr>
@@ -5607,14 +4967,7 @@
         <p:cNvGrpSpPr/>
         <p:nvPr/>
       </p:nvGrpSpPr>
-      <p:grpSpPr>
-        <a:xfrm>
-          <a:off x="0" y="0"/>
-          <a:ext cx="0" cy="0"/>
-          <a:chOff x="0" y="0"/>
-          <a:chExt cx="0" cy="0"/>
-        </a:xfrm>
-      </p:grpSpPr>
+      <p:grpSpPr/>
       <p:sp>
         <p:nvSpPr>
           <p:cNvPr id="2" name="TextBox 1"/>
@@ -5669,34 +5022,10 @@
                 <a:tableStyleId>{5C22544A-7EE6-4342-B048-85BDC9FD1C3A}</a:tableStyleId>
               </a:tblPr>
               <a:tblGrid>
-                <a:gridCol w="1645920">
-                  <a:extLst>
-                    <a:ext uri="{9D8B030D-6E8A-4147-A177-3AD203B41FA5}">
-                      <a16:colId xmlns:a16="http://schemas.microsoft.com/office/drawing/2014/main" val="20000"/>
-                    </a:ext>
-                  </a:extLst>
-                </a:gridCol>
-                <a:gridCol w="1645920">
-                  <a:extLst>
-                    <a:ext uri="{9D8B030D-6E8A-4147-A177-3AD203B41FA5}">
-                      <a16:colId xmlns:a16="http://schemas.microsoft.com/office/drawing/2014/main" val="20001"/>
-                    </a:ext>
-                  </a:extLst>
-                </a:gridCol>
-                <a:gridCol w="1645920">
-                  <a:extLst>
-                    <a:ext uri="{9D8B030D-6E8A-4147-A177-3AD203B41FA5}">
-                      <a16:colId xmlns:a16="http://schemas.microsoft.com/office/drawing/2014/main" val="20002"/>
-                    </a:ext>
-                  </a:extLst>
-                </a:gridCol>
-                <a:gridCol w="1645920">
-                  <a:extLst>
-                    <a:ext uri="{9D8B030D-6E8A-4147-A177-3AD203B41FA5}">
-                      <a16:colId xmlns:a16="http://schemas.microsoft.com/office/drawing/2014/main" val="20003"/>
-                    </a:ext>
-                  </a:extLst>
-                </a:gridCol>
+                <a:gridCol w="1645920"/>
+                <a:gridCol w="1645920"/>
+                <a:gridCol w="1645920"/>
+                <a:gridCol w="1645920"/>
               </a:tblGrid>
               <a:tr h="411480">
                 <a:tc>
@@ -5705,7 +5034,7 @@
                     <a:lstStyle/>
                     <a:p>
                       <a:r>
-                        <a:rPr sz="1400" b="1">
+                        <a:rPr b="1" sz="1400">
                           <a:solidFill>
                             <a:srgbClr val="FFFFFF"/>
                           </a:solidFill>
@@ -5726,7 +5055,7 @@
                     <a:lstStyle/>
                     <a:p>
                       <a:r>
-                        <a:rPr sz="1400" b="1">
+                        <a:rPr b="1" sz="1400">
                           <a:solidFill>
                             <a:srgbClr val="FFFFFF"/>
                           </a:solidFill>
@@ -5747,7 +5076,7 @@
                     <a:lstStyle/>
                     <a:p>
                       <a:r>
-                        <a:rPr sz="1400" b="1">
+                        <a:rPr b="1" sz="1400">
                           <a:solidFill>
                             <a:srgbClr val="FFFFFF"/>
                           </a:solidFill>
@@ -5768,7 +5097,7 @@
                     <a:lstStyle/>
                     <a:p>
                       <a:r>
-                        <a:rPr sz="1400" b="1">
+                        <a:rPr b="1" sz="1400">
                           <a:solidFill>
                             <a:srgbClr val="FFFFFF"/>
                           </a:solidFill>
@@ -5783,11 +5112,6 @@
                     </a:solidFill>
                   </a:tcPr>
                 </a:tc>
-                <a:extLst>
-                  <a:ext uri="{0D108BD9-81ED-4DB2-BD59-A6C34878D82A}">
-                    <a16:rowId xmlns:a16="http://schemas.microsoft.com/office/drawing/2014/main" val="10000"/>
-                  </a:ext>
-                </a:extLst>
               </a:tr>
               <a:tr h="411480">
                 <a:tc>
@@ -5858,11 +5182,6 @@
                   </a:txBody>
                   <a:tcPr/>
                 </a:tc>
-                <a:extLst>
-                  <a:ext uri="{0D108BD9-81ED-4DB2-BD59-A6C34878D82A}">
-                    <a16:rowId xmlns:a16="http://schemas.microsoft.com/office/drawing/2014/main" val="10001"/>
-                  </a:ext>
-                </a:extLst>
               </a:tr>
               <a:tr h="411480">
                 <a:tc>
@@ -5933,11 +5252,6 @@
                   </a:txBody>
                   <a:tcPr/>
                 </a:tc>
-                <a:extLst>
-                  <a:ext uri="{0D108BD9-81ED-4DB2-BD59-A6C34878D82A}">
-                    <a16:rowId xmlns:a16="http://schemas.microsoft.com/office/drawing/2014/main" val="10002"/>
-                  </a:ext>
-                </a:extLst>
               </a:tr>
               <a:tr h="411480">
                 <a:tc>
@@ -6008,11 +5322,6 @@
                   </a:txBody>
                   <a:tcPr/>
                 </a:tc>
-                <a:extLst>
-                  <a:ext uri="{0D108BD9-81ED-4DB2-BD59-A6C34878D82A}">
-                    <a16:rowId xmlns:a16="http://schemas.microsoft.com/office/drawing/2014/main" val="10003"/>
-                  </a:ext>
-                </a:extLst>
               </a:tr>
             </a:tbl>
           </a:graphicData>
@@ -6102,8 +5411,8 @@
         </p:blipFill>
         <p:spPr>
           <a:xfrm>
-            <a:off x="4393837" y="4450703"/>
-            <a:ext cx="6922822" cy="1918372"/>
+            <a:off x="7589520" y="1280160"/>
+            <a:ext cx="4389120" cy="1216262"/>
           </a:xfrm>
           <a:prstGeom prst="rect">
             <a:avLst/>
@@ -6119,7 +5428,7 @@
 </file>
 
 <file path=ppt/slides/slide8.xml><?xml version="1.0" encoding="utf-8"?>
-<p:sld xmlns:a="http://schemas.openxmlformats.org/drawingml/2006/main" xmlns:r="http://schemas.openxmlformats.org/officeDocument/2006/relationships" xmlns:p="http://schemas.openxmlformats.org/presentationml/2006/main">
+<p:sld xmlns:a="http://schemas.openxmlformats.org/drawingml/2006/main" xmlns:p="http://schemas.openxmlformats.org/presentationml/2006/main" xmlns:r="http://schemas.openxmlformats.org/officeDocument/2006/relationships">
   <p:cSld>
     <p:spTree>
       <p:nvGrpSpPr>
@@ -6127,14 +5436,7 @@
         <p:cNvGrpSpPr/>
         <p:nvPr/>
       </p:nvGrpSpPr>
-      <p:grpSpPr>
-        <a:xfrm>
-          <a:off x="0" y="0"/>
-          <a:ext cx="0" cy="0"/>
-          <a:chOff x="0" y="0"/>
-          <a:chExt cx="0" cy="0"/>
-        </a:xfrm>
-      </p:grpSpPr>
+      <p:grpSpPr/>
       <p:sp>
         <p:nvSpPr>
           <p:cNvPr id="2" name="TextBox 1"/>
@@ -6247,7 +5549,6 @@
                 </a:solidFill>
               </a:defRPr>
             </a:pPr>
-            <a:endParaRPr/>
           </a:p>
           <a:p>
             <a:pPr>
@@ -6305,7 +5606,7 @@
 </file>
 
 <file path=ppt/slides/slide9.xml><?xml version="1.0" encoding="utf-8"?>
-<p:sld xmlns:a="http://schemas.openxmlformats.org/drawingml/2006/main" xmlns:r="http://schemas.openxmlformats.org/officeDocument/2006/relationships" xmlns:p="http://schemas.openxmlformats.org/presentationml/2006/main">
+<p:sld xmlns:a="http://schemas.openxmlformats.org/drawingml/2006/main" xmlns:p="http://schemas.openxmlformats.org/presentationml/2006/main" xmlns:r="http://schemas.openxmlformats.org/officeDocument/2006/relationships">
   <p:cSld>
     <p:spTree>
       <p:nvGrpSpPr>
@@ -6313,14 +5614,7 @@
         <p:cNvGrpSpPr/>
         <p:nvPr/>
       </p:nvGrpSpPr>
-      <p:grpSpPr>
-        <a:xfrm>
-          <a:off x="0" y="0"/>
-          <a:ext cx="0" cy="0"/>
-          <a:chOff x="0" y="0"/>
-          <a:chExt cx="0" cy="0"/>
-        </a:xfrm>
-      </p:grpSpPr>
+      <p:grpSpPr/>
       <p:sp>
         <p:nvSpPr>
           <p:cNvPr id="2" name="TextBox 1"/>
@@ -6365,7 +5659,7 @@
         <p:spPr>
           <a:xfrm>
             <a:off x="548640" y="1280160"/>
-            <a:ext cx="10972800" cy="3785652"/>
+            <a:ext cx="10972800" cy="5029200"/>
           </a:xfrm>
           <a:prstGeom prst="rect">
             <a:avLst/>
@@ -6389,7 +5683,6 @@
               </a:defRPr>
             </a:pPr>
             <a:r>
-              <a:rPr dirty="0"/>
               <a:t>What worked</a:t>
             </a:r>
           </a:p>
@@ -6405,7 +5698,6 @@
               </a:defRPr>
             </a:pPr>
             <a:r>
-              <a:rPr dirty="0"/>
               <a:t>  • Pipelines kept CV leakage-free</a:t>
             </a:r>
           </a:p>
@@ -6421,16 +5713,7 @@
               </a:defRPr>
             </a:pPr>
             <a:r>
-              <a:rPr dirty="0"/>
-              <a:t>  • </a:t>
-            </a:r>
-            <a:r>
-              <a:rPr dirty="0" err="1"/>
-              <a:t>GridSearchCV</a:t>
-            </a:r>
-            <a:r>
-              <a:rPr dirty="0"/>
-              <a:t> materially improved Tree and MLP</a:t>
+              <a:t>  • GridSearchCV materially improved Tree and MLP</a:t>
             </a:r>
           </a:p>
           <a:p>
@@ -6444,7 +5727,6 @@
                 </a:solidFill>
               </a:defRPr>
             </a:pPr>
-            <a:endParaRPr dirty="0"/>
           </a:p>
           <a:p>
             <a:pPr>
@@ -6458,7 +5740,6 @@
               </a:defRPr>
             </a:pPr>
             <a:r>
-              <a:rPr dirty="0"/>
               <a:t>Limitations</a:t>
             </a:r>
           </a:p>
@@ -6474,16 +5755,7 @@
               </a:defRPr>
             </a:pPr>
             <a:r>
-              <a:rPr dirty="0"/>
-              <a:t>  • Titanic test set </a:t>
-            </a:r>
-            <a:r>
-              <a:rPr lang="en-US" dirty="0"/>
-              <a:t>~</a:t>
-            </a:r>
-            <a:r>
-              <a:rPr dirty="0"/>
-              <a:t>178 rows → 1–2 point gaps are noise</a:t>
+              <a:t>  • Titanic test set ~178 rows → 1–2 point gaps are noise</a:t>
             </a:r>
           </a:p>
           <a:p>
@@ -6498,7 +5770,6 @@
               </a:defRPr>
             </a:pPr>
             <a:r>
-              <a:rPr dirty="0"/>
               <a:t>  • CA target capped at $500k → residual spike at high end</a:t>
             </a:r>
           </a:p>
@@ -6514,7 +5785,6 @@
               </a:defRPr>
             </a:pPr>
             <a:r>
-              <a:rPr dirty="0"/>
               <a:t>  • No ensemble methods (out of scope per rubric)</a:t>
             </a:r>
           </a:p>
@@ -6529,7 +5799,6 @@
                 </a:solidFill>
               </a:defRPr>
             </a:pPr>
-            <a:endParaRPr dirty="0"/>
           </a:p>
           <a:p>
             <a:pPr>
@@ -6543,7 +5812,6 @@
               </a:defRPr>
             </a:pPr>
             <a:r>
-              <a:rPr dirty="0"/>
               <a:t>Next steps: feature engineering, gradient boosting, spatial features</a:t>
             </a:r>
           </a:p>
@@ -6875,319 +6143,4 @@
   </a:objectDefaults>
   <a:extraClrSchemeLst/>
 </a:theme>
-</file>
-
-<file path=ppt/theme/theme2.xml><?xml version="1.0" encoding="utf-8"?>
-<a:theme xmlns:a="http://schemas.openxmlformats.org/drawingml/2006/main" name="Office Theme">
-  <a:themeElements>
-    <a:clrScheme name="Office">
-      <a:dk1>
-        <a:sysClr val="windowText" lastClr="000000"/>
-      </a:dk1>
-      <a:lt1>
-        <a:sysClr val="window" lastClr="FFFFFF"/>
-      </a:lt1>
-      <a:dk2>
-        <a:srgbClr val="0E2841"/>
-      </a:dk2>
-      <a:lt2>
-        <a:srgbClr val="E8E8E8"/>
-      </a:lt2>
-      <a:accent1>
-        <a:srgbClr val="156082"/>
-      </a:accent1>
-      <a:accent2>
-        <a:srgbClr val="E97132"/>
-      </a:accent2>
-      <a:accent3>
-        <a:srgbClr val="196B24"/>
-      </a:accent3>
-      <a:accent4>
-        <a:srgbClr val="0F9ED5"/>
-      </a:accent4>
-      <a:accent5>
-        <a:srgbClr val="A02B93"/>
-      </a:accent5>
-      <a:accent6>
-        <a:srgbClr val="4EA72E"/>
-      </a:accent6>
-      <a:hlink>
-        <a:srgbClr val="467886"/>
-      </a:hlink>
-      <a:folHlink>
-        <a:srgbClr val="96607D"/>
-      </a:folHlink>
-    </a:clrScheme>
-    <a:fontScheme name="Office">
-      <a:majorFont>
-        <a:latin typeface="Aptos Display" panose="02110004020202020204"/>
-        <a:ea typeface=""/>
-        <a:cs typeface=""/>
-        <a:font script="Jpan" typeface="游ゴシック Light"/>
-        <a:font script="Hang" typeface="맑은 고딕"/>
-        <a:font script="Hans" typeface="等线 Light"/>
-        <a:font script="Hant" typeface="新細明體"/>
-        <a:font script="Arab" typeface="Times New Roman"/>
-        <a:font script="Hebr" typeface="Times New Roman"/>
-        <a:font script="Thai" typeface="Angsana New"/>
-        <a:font script="Ethi" typeface="Nyala"/>
-        <a:font script="Beng" typeface="Vrinda"/>
-        <a:font script="Gujr" typeface="Shruti"/>
-        <a:font script="Khmr" typeface="MoolBoran"/>
-        <a:font script="Knda" typeface="Tunga"/>
-        <a:font script="Guru" typeface="Raavi"/>
-        <a:font script="Cans" typeface="Euphemia"/>
-        <a:font script="Cher" typeface="Plantagenet Cherokee"/>
-        <a:font script="Yiii" typeface="Microsoft Yi Baiti"/>
-        <a:font script="Tibt" typeface="Microsoft Himalaya"/>
-        <a:font script="Thaa" typeface="MV Boli"/>
-        <a:font script="Deva" typeface="Mangal"/>
-        <a:font script="Telu" typeface="Gautami"/>
-        <a:font script="Taml" typeface="Latha"/>
-        <a:font script="Syrc" typeface="Estrangelo Edessa"/>
-        <a:font script="Orya" typeface="Kalinga"/>
-        <a:font script="Mlym" typeface="Kartika"/>
-        <a:font script="Laoo" typeface="DokChampa"/>
-        <a:font script="Sinh" typeface="Iskoola Pota"/>
-        <a:font script="Mong" typeface="Mongolian Baiti"/>
-        <a:font script="Viet" typeface="Times New Roman"/>
-        <a:font script="Uigh" typeface="Microsoft Uighur"/>
-        <a:font script="Geor" typeface="Sylfaen"/>
-        <a:font script="Armn" typeface="Arial"/>
-        <a:font script="Bugi" typeface="Leelawadee UI"/>
-        <a:font script="Bopo" typeface="Microsoft JhengHei"/>
-        <a:font script="Java" typeface="Javanese Text"/>
-        <a:font script="Lisu" typeface="Segoe UI"/>
-        <a:font script="Mymr" typeface="Myanmar Text"/>
-        <a:font script="Nkoo" typeface="Ebrima"/>
-        <a:font script="Olck" typeface="Nirmala UI"/>
-        <a:font script="Osma" typeface="Ebrima"/>
-        <a:font script="Phag" typeface="Phagspa"/>
-        <a:font script="Syrn" typeface="Estrangelo Edessa"/>
-        <a:font script="Syrj" typeface="Estrangelo Edessa"/>
-        <a:font script="Syre" typeface="Estrangelo Edessa"/>
-        <a:font script="Sora" typeface="Nirmala UI"/>
-        <a:font script="Tale" typeface="Microsoft Tai Le"/>
-        <a:font script="Talu" typeface="Microsoft New Tai Lue"/>
-        <a:font script="Tfng" typeface="Ebrima"/>
-      </a:majorFont>
-      <a:minorFont>
-        <a:latin typeface="Aptos" panose="02110004020202020204"/>
-        <a:ea typeface=""/>
-        <a:cs typeface=""/>
-        <a:font script="Jpan" typeface="游ゴシック"/>
-        <a:font script="Hang" typeface="맑은 고딕"/>
-        <a:font script="Hans" typeface="等线"/>
-        <a:font script="Hant" typeface="新細明體"/>
-        <a:font script="Arab" typeface="Arial"/>
-        <a:font script="Hebr" typeface="Arial"/>
-        <a:font script="Thai" typeface="Cordia New"/>
-        <a:font script="Ethi" typeface="Nyala"/>
-        <a:font script="Beng" typeface="Vrinda"/>
-        <a:font script="Gujr" typeface="Shruti"/>
-        <a:font script="Khmr" typeface="DaunPenh"/>
-        <a:font script="Knda" typeface="Tunga"/>
-        <a:font script="Guru" typeface="Raavi"/>
-        <a:font script="Cans" typeface="Euphemia"/>
-        <a:font script="Cher" typeface="Plantagenet Cherokee"/>
-        <a:font script="Yiii" typeface="Microsoft Yi Baiti"/>
-        <a:font script="Tibt" typeface="Microsoft Himalaya"/>
-        <a:font script="Thaa" typeface="MV Boli"/>
-        <a:font script="Deva" typeface="Mangal"/>
-        <a:font script="Telu" typeface="Gautami"/>
-        <a:font script="Taml" typeface="Latha"/>
-        <a:font script="Syrc" typeface="Estrangelo Edessa"/>
-        <a:font script="Orya" typeface="Kalinga"/>
-        <a:font script="Mlym" typeface="Kartika"/>
-        <a:font script="Laoo" typeface="DokChampa"/>
-        <a:font script="Sinh" typeface="Iskoola Pota"/>
-        <a:font script="Mong" typeface="Mongolian Baiti"/>
-        <a:font script="Viet" typeface="Arial"/>
-        <a:font script="Uigh" typeface="Microsoft Uighur"/>
-        <a:font script="Geor" typeface="Sylfaen"/>
-        <a:font script="Armn" typeface="Arial"/>
-        <a:font script="Bugi" typeface="Leelawadee UI"/>
-        <a:font script="Bopo" typeface="Microsoft JhengHei"/>
-        <a:font script="Java" typeface="Javanese Text"/>
-        <a:font script="Lisu" typeface="Segoe UI"/>
-        <a:font script="Mymr" typeface="Myanmar Text"/>
-        <a:font script="Nkoo" typeface="Ebrima"/>
-        <a:font script="Olck" typeface="Nirmala UI"/>
-        <a:font script="Osma" typeface="Ebrima"/>
-        <a:font script="Phag" typeface="Phagspa"/>
-        <a:font script="Syrn" typeface="Estrangelo Edessa"/>
-        <a:font script="Syrj" typeface="Estrangelo Edessa"/>
-        <a:font script="Syre" typeface="Estrangelo Edessa"/>
-        <a:font script="Sora" typeface="Nirmala UI"/>
-        <a:font script="Tale" typeface="Microsoft Tai Le"/>
-        <a:font script="Talu" typeface="Microsoft New Tai Lue"/>
-        <a:font script="Tfng" typeface="Ebrima"/>
-      </a:minorFont>
-    </a:fontScheme>
-    <a:fmtScheme name="Office">
-      <a:fillStyleLst>
-        <a:solidFill>
-          <a:schemeClr val="phClr"/>
-        </a:solidFill>
-        <a:gradFill rotWithShape="1">
-          <a:gsLst>
-            <a:gs pos="0">
-              <a:schemeClr val="phClr">
-                <a:lumMod val="110000"/>
-                <a:satMod val="105000"/>
-                <a:tint val="67000"/>
-              </a:schemeClr>
-            </a:gs>
-            <a:gs pos="50000">
-              <a:schemeClr val="phClr">
-                <a:lumMod val="105000"/>
-                <a:satMod val="103000"/>
-                <a:tint val="73000"/>
-              </a:schemeClr>
-            </a:gs>
-            <a:gs pos="100000">
-              <a:schemeClr val="phClr">
-                <a:lumMod val="105000"/>
-                <a:satMod val="109000"/>
-                <a:tint val="81000"/>
-              </a:schemeClr>
-            </a:gs>
-          </a:gsLst>
-          <a:lin ang="5400000" scaled="0"/>
-        </a:gradFill>
-        <a:gradFill rotWithShape="1">
-          <a:gsLst>
-            <a:gs pos="0">
-              <a:schemeClr val="phClr">
-                <a:satMod val="103000"/>
-                <a:lumMod val="102000"/>
-                <a:tint val="94000"/>
-              </a:schemeClr>
-            </a:gs>
-            <a:gs pos="50000">
-              <a:schemeClr val="phClr">
-                <a:satMod val="110000"/>
-                <a:lumMod val="100000"/>
-                <a:shade val="100000"/>
-              </a:schemeClr>
-            </a:gs>
-            <a:gs pos="100000">
-              <a:schemeClr val="phClr">
-                <a:lumMod val="99000"/>
-                <a:satMod val="120000"/>
-                <a:shade val="78000"/>
-              </a:schemeClr>
-            </a:gs>
-          </a:gsLst>
-          <a:lin ang="5400000" scaled="0"/>
-        </a:gradFill>
-      </a:fillStyleLst>
-      <a:lnStyleLst>
-        <a:ln w="12700" cap="flat" cmpd="sng" algn="ctr">
-          <a:solidFill>
-            <a:schemeClr val="phClr"/>
-          </a:solidFill>
-          <a:prstDash val="solid"/>
-          <a:miter lim="800000"/>
-        </a:ln>
-        <a:ln w="19050" cap="flat" cmpd="sng" algn="ctr">
-          <a:solidFill>
-            <a:schemeClr val="phClr"/>
-          </a:solidFill>
-          <a:prstDash val="solid"/>
-          <a:miter lim="800000"/>
-        </a:ln>
-        <a:ln w="25400" cap="flat" cmpd="sng" algn="ctr">
-          <a:solidFill>
-            <a:schemeClr val="phClr"/>
-          </a:solidFill>
-          <a:prstDash val="solid"/>
-          <a:miter lim="800000"/>
-        </a:ln>
-      </a:lnStyleLst>
-      <a:effectStyleLst>
-        <a:effectStyle>
-          <a:effectLst/>
-        </a:effectStyle>
-        <a:effectStyle>
-          <a:effectLst/>
-        </a:effectStyle>
-        <a:effectStyle>
-          <a:effectLst>
-            <a:outerShdw blurRad="57150" dist="19050" dir="5400000" algn="ctr" rotWithShape="0">
-              <a:srgbClr val="000000">
-                <a:alpha val="63000"/>
-              </a:srgbClr>
-            </a:outerShdw>
-          </a:effectLst>
-        </a:effectStyle>
-      </a:effectStyleLst>
-      <a:bgFillStyleLst>
-        <a:solidFill>
-          <a:schemeClr val="phClr"/>
-        </a:solidFill>
-        <a:solidFill>
-          <a:schemeClr val="phClr">
-            <a:tint val="95000"/>
-            <a:satMod val="170000"/>
-          </a:schemeClr>
-        </a:solidFill>
-        <a:gradFill rotWithShape="1">
-          <a:gsLst>
-            <a:gs pos="0">
-              <a:schemeClr val="phClr">
-                <a:tint val="93000"/>
-                <a:satMod val="150000"/>
-                <a:shade val="98000"/>
-                <a:lumMod val="102000"/>
-              </a:schemeClr>
-            </a:gs>
-            <a:gs pos="50000">
-              <a:schemeClr val="phClr">
-                <a:tint val="98000"/>
-                <a:satMod val="130000"/>
-                <a:shade val="90000"/>
-                <a:lumMod val="103000"/>
-              </a:schemeClr>
-            </a:gs>
-            <a:gs pos="100000">
-              <a:schemeClr val="phClr">
-                <a:shade val="63000"/>
-                <a:satMod val="120000"/>
-              </a:schemeClr>
-            </a:gs>
-          </a:gsLst>
-          <a:lin ang="5400000" scaled="0"/>
-        </a:gradFill>
-      </a:bgFillStyleLst>
-    </a:fmtScheme>
-  </a:themeElements>
-  <a:objectDefaults>
-    <a:lnDef>
-      <a:spPr/>
-      <a:bodyPr/>
-      <a:lstStyle/>
-      <a:style>
-        <a:lnRef idx="2">
-          <a:schemeClr val="accent1"/>
-        </a:lnRef>
-        <a:fillRef idx="0">
-          <a:schemeClr val="accent1"/>
-        </a:fillRef>
-        <a:effectRef idx="1">
-          <a:schemeClr val="accent1"/>
-        </a:effectRef>
-        <a:fontRef idx="minor">
-          <a:schemeClr val="tx1"/>
-        </a:fontRef>
-      </a:style>
-    </a:lnDef>
-  </a:objectDefaults>
-  <a:extraClrSchemeLst/>
-  <a:extLst>
-    <a:ext uri="{05A4C25C-085E-4340-85A3-A5531E510DB2}">
-      <thm15:themeFamily xmlns:thm15="http://schemas.microsoft.com/office/thememl/2012/main" name="Office Theme" id="{2E142A2C-CD16-42D6-873A-C26D2A0506FA}" vid="{1BDDFF52-6CD6-40A5-AB3C-68EB2F1E4D0A}"/>
-    </a:ext>
-  </a:extLst>
-</a:theme>
 </file>